--- a/output/doc/user-flow-decks/zz-user-flow-template.pptx
+++ b/output/doc/user-flow-decks/zz-user-flow-template.pptx
@@ -3361,7 +3361,7 @@
                 </a:solidFill>
                 <a:latin typeface="Aptos"/>
               </a:rPr>
-              <a:t>Generated: 2026-04-11</a:t>
+              <a:t>Generated: 2026-04-23</a:t>
             </a:r>
           </a:p>
         </p:txBody>
@@ -5323,7 +5323,7 @@
                 </a:solidFill>
                 <a:latin typeface="Aptos"/>
               </a:rPr>
-              <a:t>Generated on 2026-04-11.</a:t>
+              <a:t>Generated on 2026-04-23.</a:t>
             </a:r>
           </a:p>
         </p:txBody>
@@ -5581,7 +5581,7 @@
                 </a:solidFill>
                 <a:latin typeface="Aptos"/>
               </a:rPr>
-              <a:t>Generated on 2026-04-11.</a:t>
+              <a:t>Generated on 2026-04-23.</a:t>
             </a:r>
           </a:p>
         </p:txBody>
